--- a/assets/powerpoints/module-deplacement/B3-jusqu-a-vers-par.pptx
+++ b/assets/powerpoints/module-deplacement/B3-jusqu-a-vers-par.pptx
@@ -9674,7 +9674,43 @@
                 </a:solidFill>
                 <a:latin typeface="Verdana"/>
               </a:rPr>
-              <a:t>« Continuez jusqu'au feu » : la personne sait exactement quand s'arrêter. Attention à la fusion : à + le donne &lt;b&gt;au&lt;/b&gt;, à + les donne &lt;b&gt;aux&lt;/b&gt;. Devant un nom de lieu sans déterminant, pas de fusion : jusqu'à Longueuil.</a:t>
+              <a:t>« Continuez jusqu'au feu » : la personne sait exactement quand s'arrêter. Attention à la fusion : à + le donne </a:t>
+            </a:r>
+            <a:r>
+              <a:rPr sz="2000" b="1" i="0">
+                <a:solidFill>
+                  <a:srgbClr val="4B4F52"/>
+                </a:solidFill>
+                <a:latin typeface="Verdana"/>
+              </a:rPr>
+              <a:t>au</a:t>
+            </a:r>
+            <a:r>
+              <a:rPr sz="2000" b="0" i="0">
+                <a:solidFill>
+                  <a:srgbClr val="4B4F52"/>
+                </a:solidFill>
+                <a:latin typeface="Verdana"/>
+              </a:rPr>
+              <a:t>, à + les donne </a:t>
+            </a:r>
+            <a:r>
+              <a:rPr sz="2000" b="1" i="0">
+                <a:solidFill>
+                  <a:srgbClr val="4B4F52"/>
+                </a:solidFill>
+                <a:latin typeface="Verdana"/>
+              </a:rPr>
+              <a:t>aux</a:t>
+            </a:r>
+            <a:r>
+              <a:rPr sz="2000" b="0" i="0">
+                <a:solidFill>
+                  <a:srgbClr val="4B4F52"/>
+                </a:solidFill>
+                <a:latin typeface="Verdana"/>
+              </a:rPr>
+              <a:t>. Devant un nom de lieu sans déterminant, pas de fusion : jusqu'à Longueuil.</a:t>
             </a:r>
           </a:p>
         </p:txBody>
@@ -10368,7 +10404,25 @@
                 </a:solidFill>
                 <a:latin typeface="Verdana"/>
               </a:rPr>
-              <a:t>« Passez par le corridor vitré. » · « Sortez par la porte principale. » Sa cousine &lt;b&gt;à travers&lt;/b&gt; insiste sur le fait de traverser quelque chose : à travers le parc, à travers le boisé.</a:t>
+              <a:t>« Passez par le corridor vitré. » · « Sortez par la porte principale. » Sa cousine </a:t>
+            </a:r>
+            <a:r>
+              <a:rPr sz="2000" b="1" i="0">
+                <a:solidFill>
+                  <a:srgbClr val="4B4F52"/>
+                </a:solidFill>
+                <a:latin typeface="Verdana"/>
+              </a:rPr>
+              <a:t>à travers</a:t>
+            </a:r>
+            <a:r>
+              <a:rPr sz="2000" b="0" i="0">
+                <a:solidFill>
+                  <a:srgbClr val="4B4F52"/>
+                </a:solidFill>
+                <a:latin typeface="Verdana"/>
+              </a:rPr>
+              <a:t> insiste sur le fait de traverser quelque chose : à travers le parc, à travers le boisé.</a:t>
             </a:r>
           </a:p>
         </p:txBody>
